--- a/dist/초1/국어/한글/초1_국어_한글_02_기본자음.pptx
+++ b/dist/초1/국어/한글/초1_국어_한글_02_기본자음.pptx
@@ -120,13 +120,13 @@
   <p:extLst>
     <p:ext uri="{521415D9-36F7-43E2-AB2F-B90AF26B5E84}">
       <p14:sectionLst xmlns:p14="http://schemas.microsoft.com/office/powerpoint/2010/main">
-        <p14:section name="도입" id="{5693cfe3-3873-2879-4767-fa07cef9d377}">
+        <p14:section name="도입" id="{8b478f68-3929-b5d4-6faf-a4d68c4afdbc}">
           <p14:sldIdLst>
             <p14:sldId id="256"/>
             <p14:sldId id="257"/>
           </p14:sldIdLst>
         </p14:section>
-        <p14:section name="개념" id="{8588c9fb-5f41-bfa8-350c-555865d1a85e}">
+        <p14:section name="개념" id="{cb435302-3705-dbcb-be43-0cfaa1c5493d}">
           <p14:sldIdLst>
             <p14:sldId id="258"/>
             <p14:sldId id="259"/>
@@ -134,26 +134,26 @@
             <p14:sldId id="261"/>
           </p14:sldIdLst>
         </p14:section>
-        <p14:section name="연습" id="{472de9ee-c689-c90c-59e0-74d1767f5d94}">
+        <p14:section name="연습" id="{be62b7e7-cbf3-2971-cac0-3b5a0714cb79}">
           <p14:sldIdLst>
             <p14:sldId id="262"/>
             <p14:sldId id="263"/>
             <p14:sldId id="264"/>
           </p14:sldIdLst>
         </p14:section>
-        <p14:section name="확인" id="{41432a27-8e7c-18d2-4113-1def464e3a46}">
+        <p14:section name="확인" id="{e4bbb192-ee7d-5ddf-5c12-cc1d83674747}">
           <p14:sldIdLst>
             <p14:sldId id="265"/>
             <p14:sldId id="266"/>
             <p14:sldId id="267"/>
           </p14:sldIdLst>
         </p14:section>
-        <p14:section name="정리" id="{529cc141-9f36-b622-91de-f801adee461e}">
+        <p14:section name="정리" id="{f7379787-2dc5-f240-a3d5-d1c80f75d19c}">
           <p14:sldIdLst>
             <p14:sldId id="268"/>
           </p14:sldIdLst>
         </p14:section>
-        <p14:section name="보충" id="{d2a280cb-1275-bec9-d81d-aecdbbb164ea}">
+        <p14:section name="보충" id="{586756e0-865d-6912-d727-01cec36a74cf}">
           <p14:sldIdLst>
             <p14:sldId id="269"/>
           </p14:sldIdLst>
@@ -963,7 +963,9 @@
 예상 답
 - “이름은 기역, 소리는 [그]예요.”
 정답
-- ① 니은, 비읍, 이응, 치읓[치읃], 키읔[키윽] ② [스] ③ ㄴ</a:t>
+- ① 니은, 비읍, 이응, 치읓[치읃], 키읔[키윽] ② [스] ③ ㄴ
+주의
+- 활동지 1~4는 수업을 마친 뒤 이어서 하거나 다음 날 합니다. 활동지의 자음자가 작게 느껴지면 부모가 빈 종이에 손바닥만 하게 써 주고 따라 쓰게 합니다.</a:t>
             </a:r>
             <a:endParaRPr lang="en-US" dirty="0"/>
           </a:p>
@@ -8824,12 +8826,12 @@
         </p:nvSpPr>
         <p:spPr>
           <a:xfrm>
-            <a:off x="2318004" y="2125980"/>
-            <a:ext cx="1737360" cy="1737360"/>
+            <a:off x="1403604" y="1897380"/>
+            <a:ext cx="2194560" cy="2194560"/>
           </a:xfrm>
           <a:prstGeom prst="roundRect">
             <a:avLst>
-              <a:gd name="adj" fmla="val 7368"/>
+              <a:gd name="adj" fmla="val 5833"/>
             </a:avLst>
           </a:prstGeom>
           <a:solidFill>
@@ -8849,7 +8851,7 @@
               <a:buNone/>
             </a:pPr>
             <a:r>
-              <a:rPr lang="ko-KR" altLang="en-US" sz="7500" b="1" dirty="0">
+              <a:rPr lang="ko-KR" altLang="en-US" sz="9500" b="1" dirty="0">
                 <a:solidFill>
                   <a:srgbClr val="1F2937"/>
                 </a:solidFill>
@@ -8859,7 +8861,7 @@
               </a:rPr>
               <a:t>ㄱ</a:t>
             </a:r>
-            <a:endParaRPr lang="ko-KR" sz="7500" dirty="0"/>
+            <a:endParaRPr lang="ko-KR" sz="9500" dirty="0"/>
           </a:p>
         </p:txBody>
       </p:sp>
@@ -8871,8 +8873,8 @@
         </p:nvSpPr>
         <p:spPr>
           <a:xfrm>
-            <a:off x="2217420" y="3899916"/>
-            <a:ext cx="1938528" cy="402336"/>
+            <a:off x="1303020" y="4128516"/>
+            <a:ext cx="2395728" cy="402336"/>
           </a:xfrm>
           <a:prstGeom prst="rect">
             <a:avLst/>
@@ -8910,12 +8912,12 @@
         </p:nvSpPr>
         <p:spPr>
           <a:xfrm>
-            <a:off x="4256532" y="2125980"/>
-            <a:ext cx="1737360" cy="1737360"/>
+            <a:off x="3799332" y="1897380"/>
+            <a:ext cx="2194560" cy="2194560"/>
           </a:xfrm>
           <a:prstGeom prst="roundRect">
             <a:avLst>
-              <a:gd name="adj" fmla="val 7368"/>
+              <a:gd name="adj" fmla="val 5833"/>
             </a:avLst>
           </a:prstGeom>
           <a:solidFill>
@@ -8935,7 +8937,7 @@
               <a:buNone/>
             </a:pPr>
             <a:r>
-              <a:rPr lang="ko-KR" altLang="en-US" sz="7500" b="1" dirty="0">
+              <a:rPr lang="ko-KR" altLang="en-US" sz="9500" b="1" dirty="0">
                 <a:solidFill>
                   <a:srgbClr val="1F2937"/>
                 </a:solidFill>
@@ -8945,7 +8947,7 @@
               </a:rPr>
               <a:t>ㄴ</a:t>
             </a:r>
-            <a:endParaRPr lang="ko-KR" sz="7500" dirty="0"/>
+            <a:endParaRPr lang="ko-KR" sz="9500" dirty="0"/>
           </a:p>
         </p:txBody>
       </p:sp>
@@ -8957,8 +8959,8 @@
         </p:nvSpPr>
         <p:spPr>
           <a:xfrm>
-            <a:off x="4155948" y="3899916"/>
-            <a:ext cx="1938528" cy="402336"/>
+            <a:off x="3698748" y="4128516"/>
+            <a:ext cx="2395728" cy="402336"/>
           </a:xfrm>
           <a:prstGeom prst="rect">
             <a:avLst/>
@@ -8996,12 +8998,12 @@
         </p:nvSpPr>
         <p:spPr>
           <a:xfrm>
-            <a:off x="6195060" y="2125980"/>
-            <a:ext cx="1737360" cy="1737360"/>
+            <a:off x="6195060" y="1897380"/>
+            <a:ext cx="2194560" cy="2194560"/>
           </a:xfrm>
           <a:prstGeom prst="roundRect">
             <a:avLst>
-              <a:gd name="adj" fmla="val 7368"/>
+              <a:gd name="adj" fmla="val 5833"/>
             </a:avLst>
           </a:prstGeom>
           <a:solidFill>
@@ -9021,7 +9023,7 @@
               <a:buNone/>
             </a:pPr>
             <a:r>
-              <a:rPr lang="ko-KR" altLang="en-US" sz="7500" b="1" dirty="0">
+              <a:rPr lang="ko-KR" altLang="en-US" sz="9500" b="1" dirty="0">
                 <a:solidFill>
                   <a:srgbClr val="1F2937"/>
                 </a:solidFill>
@@ -9031,7 +9033,7 @@
               </a:rPr>
               <a:t>ㅁ</a:t>
             </a:r>
-            <a:endParaRPr lang="ko-KR" sz="7500" dirty="0"/>
+            <a:endParaRPr lang="ko-KR" sz="9500" dirty="0"/>
           </a:p>
         </p:txBody>
       </p:sp>
@@ -9043,8 +9045,8 @@
         </p:nvSpPr>
         <p:spPr>
           <a:xfrm>
-            <a:off x="6094476" y="3899916"/>
-            <a:ext cx="1938528" cy="402336"/>
+            <a:off x="6094476" y="4128516"/>
+            <a:ext cx="2395728" cy="402336"/>
           </a:xfrm>
           <a:prstGeom prst="rect">
             <a:avLst/>
@@ -9082,12 +9084,12 @@
         </p:nvSpPr>
         <p:spPr>
           <a:xfrm>
-            <a:off x="8133588" y="2125980"/>
-            <a:ext cx="1737360" cy="1737360"/>
+            <a:off x="8590788" y="1897380"/>
+            <a:ext cx="2194560" cy="2194560"/>
           </a:xfrm>
           <a:prstGeom prst="roundRect">
             <a:avLst>
-              <a:gd name="adj" fmla="val 7368"/>
+              <a:gd name="adj" fmla="val 5833"/>
             </a:avLst>
           </a:prstGeom>
           <a:solidFill>
@@ -9107,7 +9109,7 @@
               <a:buNone/>
             </a:pPr>
             <a:r>
-              <a:rPr lang="ko-KR" altLang="en-US" sz="7500" b="1" dirty="0">
+              <a:rPr lang="ko-KR" altLang="en-US" sz="9500" b="1" dirty="0">
                 <a:solidFill>
                   <a:srgbClr val="1F2937"/>
                 </a:solidFill>
@@ -9117,7 +9119,7 @@
               </a:rPr>
               <a:t>ㅅ</a:t>
             </a:r>
-            <a:endParaRPr lang="ko-KR" sz="7500" dirty="0"/>
+            <a:endParaRPr lang="ko-KR" sz="9500" dirty="0"/>
           </a:p>
         </p:txBody>
       </p:sp>
@@ -9129,8 +9131,8 @@
         </p:nvSpPr>
         <p:spPr>
           <a:xfrm>
-            <a:off x="8033004" y="3899916"/>
-            <a:ext cx="1938528" cy="402336"/>
+            <a:off x="8490204" y="4128516"/>
+            <a:ext cx="2395728" cy="402336"/>
           </a:xfrm>
           <a:prstGeom prst="rect">
             <a:avLst/>

--- a/dist/초1/국어/한글/초1_국어_한글_02_기본자음.pptx
+++ b/dist/초1/국어/한글/초1_국어_한글_02_기본자음.pptx
@@ -120,13 +120,13 @@
   <p:extLst>
     <p:ext uri="{521415D9-36F7-43E2-AB2F-B90AF26B5E84}">
       <p14:sectionLst xmlns:p14="http://schemas.microsoft.com/office/powerpoint/2010/main">
-        <p14:section name="도입" id="{8b478f68-3929-b5d4-6faf-a4d68c4afdbc}">
+        <p14:section name="도입" id="{7a361494-8ca4-f420-750a-39bc36eb996e}">
           <p14:sldIdLst>
             <p14:sldId id="256"/>
             <p14:sldId id="257"/>
           </p14:sldIdLst>
         </p14:section>
-        <p14:section name="개념" id="{cb435302-3705-dbcb-be43-0cfaa1c5493d}">
+        <p14:section name="개념" id="{2faba034-8c9e-942d-10c0-c64c5da061d7}">
           <p14:sldIdLst>
             <p14:sldId id="258"/>
             <p14:sldId id="259"/>
@@ -134,26 +134,26 @@
             <p14:sldId id="261"/>
           </p14:sldIdLst>
         </p14:section>
-        <p14:section name="연습" id="{be62b7e7-cbf3-2971-cac0-3b5a0714cb79}">
+        <p14:section name="연습" id="{af8d108e-857d-7a9f-2abe-ef33da81ab20}">
           <p14:sldIdLst>
             <p14:sldId id="262"/>
             <p14:sldId id="263"/>
             <p14:sldId id="264"/>
           </p14:sldIdLst>
         </p14:section>
-        <p14:section name="확인" id="{e4bbb192-ee7d-5ddf-5c12-cc1d83674747}">
+        <p14:section name="확인" id="{1ff69645-043d-f23f-650d-fd6135ff6599}">
           <p14:sldIdLst>
             <p14:sldId id="265"/>
             <p14:sldId id="266"/>
             <p14:sldId id="267"/>
           </p14:sldIdLst>
         </p14:section>
-        <p14:section name="정리" id="{f7379787-2dc5-f240-a3d5-d1c80f75d19c}">
+        <p14:section name="정리" id="{2468a9e3-91b7-f20d-6c25-2b4844fd5832}">
           <p14:sldIdLst>
             <p14:sldId id="268"/>
           </p14:sldIdLst>
         </p14:section>
-        <p14:section name="보충" id="{586756e0-865d-6912-d727-01cec36a74cf}">
+        <p14:section name="보충" id="{d1e3630a-57ca-e69c-4d41-844508012d39}">
           <p14:sldIdLst>
             <p14:sldId id="269"/>
           </p14:sldIdLst>
@@ -3467,12 +3467,12 @@
         </p:nvSpPr>
         <p:spPr>
           <a:xfrm>
-            <a:off x="1344168" y="2017776"/>
-            <a:ext cx="1267968" cy="1267968"/>
+            <a:off x="1965960" y="2011680"/>
+            <a:ext cx="1280160" cy="1280160"/>
           </a:xfrm>
           <a:prstGeom prst="roundRect">
             <a:avLst>
-              <a:gd name="adj" fmla="val 10096"/>
+              <a:gd name="adj" fmla="val 10000"/>
             </a:avLst>
           </a:prstGeom>
           <a:solidFill>
@@ -3514,12 +3514,12 @@
         </p:nvSpPr>
         <p:spPr>
           <a:xfrm>
-            <a:off x="2813304" y="2017776"/>
-            <a:ext cx="1267968" cy="1267968"/>
+            <a:off x="3447288" y="2011680"/>
+            <a:ext cx="1280160" cy="1280160"/>
           </a:xfrm>
           <a:prstGeom prst="roundRect">
             <a:avLst>
-              <a:gd name="adj" fmla="val 10096"/>
+              <a:gd name="adj" fmla="val 10000"/>
             </a:avLst>
           </a:prstGeom>
           <a:solidFill>
@@ -3561,12 +3561,12 @@
         </p:nvSpPr>
         <p:spPr>
           <a:xfrm>
-            <a:off x="4282440" y="2017776"/>
-            <a:ext cx="1267968" cy="1267968"/>
+            <a:off x="4928616" y="2011680"/>
+            <a:ext cx="1280160" cy="1280160"/>
           </a:xfrm>
           <a:prstGeom prst="roundRect">
             <a:avLst>
-              <a:gd name="adj" fmla="val 10096"/>
+              <a:gd name="adj" fmla="val 10000"/>
             </a:avLst>
           </a:prstGeom>
           <a:solidFill>
@@ -3655,12 +3655,12 @@
         </p:nvSpPr>
         <p:spPr>
           <a:xfrm>
-            <a:off x="1344168" y="3480816"/>
-            <a:ext cx="1267968" cy="1267968"/>
+            <a:off x="1965960" y="3474720"/>
+            <a:ext cx="1280160" cy="1280160"/>
           </a:xfrm>
           <a:prstGeom prst="roundRect">
             <a:avLst>
-              <a:gd name="adj" fmla="val 10096"/>
+              <a:gd name="adj" fmla="val 10000"/>
             </a:avLst>
           </a:prstGeom>
           <a:solidFill>
@@ -3702,12 +3702,12 @@
         </p:nvSpPr>
         <p:spPr>
           <a:xfrm>
-            <a:off x="2813304" y="3480816"/>
-            <a:ext cx="1267968" cy="1267968"/>
+            <a:off x="3447288" y="3474720"/>
+            <a:ext cx="1280160" cy="1280160"/>
           </a:xfrm>
           <a:prstGeom prst="roundRect">
             <a:avLst>
-              <a:gd name="adj" fmla="val 10096"/>
+              <a:gd name="adj" fmla="val 10000"/>
             </a:avLst>
           </a:prstGeom>
           <a:solidFill>
@@ -3749,12 +3749,12 @@
         </p:nvSpPr>
         <p:spPr>
           <a:xfrm>
-            <a:off x="4282440" y="3480816"/>
-            <a:ext cx="1267968" cy="1267968"/>
+            <a:off x="4928616" y="3474720"/>
+            <a:ext cx="1280160" cy="1280160"/>
           </a:xfrm>
           <a:prstGeom prst="roundRect">
             <a:avLst>
-              <a:gd name="adj" fmla="val 10096"/>
+              <a:gd name="adj" fmla="val 10000"/>
             </a:avLst>
           </a:prstGeom>
           <a:solidFill>
@@ -3843,12 +3843,12 @@
         </p:nvSpPr>
         <p:spPr>
           <a:xfrm>
-            <a:off x="1344168" y="4943856"/>
-            <a:ext cx="1267968" cy="1267968"/>
+            <a:off x="1965960" y="4937760"/>
+            <a:ext cx="1280160" cy="1280160"/>
           </a:xfrm>
           <a:prstGeom prst="roundRect">
             <a:avLst>
-              <a:gd name="adj" fmla="val 10096"/>
+              <a:gd name="adj" fmla="val 10000"/>
             </a:avLst>
           </a:prstGeom>
           <a:solidFill>
@@ -3890,12 +3890,12 @@
         </p:nvSpPr>
         <p:spPr>
           <a:xfrm>
-            <a:off x="2813304" y="4943856"/>
-            <a:ext cx="1267968" cy="1267968"/>
+            <a:off x="3447288" y="4937760"/>
+            <a:ext cx="1280160" cy="1280160"/>
           </a:xfrm>
           <a:prstGeom prst="roundRect">
             <a:avLst>
-              <a:gd name="adj" fmla="val 10096"/>
+              <a:gd name="adj" fmla="val 10000"/>
             </a:avLst>
           </a:prstGeom>
           <a:solidFill>
@@ -3937,12 +3937,12 @@
         </p:nvSpPr>
         <p:spPr>
           <a:xfrm>
-            <a:off x="4282440" y="4943856"/>
-            <a:ext cx="1267968" cy="1267968"/>
+            <a:off x="4928616" y="4937760"/>
+            <a:ext cx="1280160" cy="1280160"/>
           </a:xfrm>
           <a:prstGeom prst="roundRect">
             <a:avLst>
-              <a:gd name="adj" fmla="val 10096"/>
+              <a:gd name="adj" fmla="val 10000"/>
             </a:avLst>
           </a:prstGeom>
           <a:solidFill>
@@ -10250,12 +10250,12 @@
         </p:nvSpPr>
         <p:spPr>
           <a:xfrm>
-            <a:off x="1344168" y="2109216"/>
-            <a:ext cx="1267968" cy="1267968"/>
+            <a:off x="1369314" y="2057400"/>
+            <a:ext cx="1371600" cy="1371600"/>
           </a:xfrm>
           <a:prstGeom prst="roundRect">
             <a:avLst>
-              <a:gd name="adj" fmla="val 10096"/>
+              <a:gd name="adj" fmla="val 9333"/>
             </a:avLst>
           </a:prstGeom>
           <a:solidFill>
@@ -10275,7 +10275,7 @@
               <a:buNone/>
             </a:pPr>
             <a:r>
-              <a:rPr lang="ko-KR" altLang="en-US" sz="5500" b="1" dirty="0">
+              <a:rPr lang="ko-KR" altLang="en-US" sz="5900" b="1" dirty="0">
                 <a:solidFill>
                   <a:srgbClr val="1F2937"/>
                 </a:solidFill>
@@ -10285,7 +10285,7 @@
               </a:rPr>
               <a:t>ㄱ</a:t>
             </a:r>
-            <a:endParaRPr lang="ko-KR" sz="5500" dirty="0"/>
+            <a:endParaRPr lang="ko-KR" sz="5900" dirty="0"/>
           </a:p>
         </p:txBody>
       </p:sp>
@@ -10297,12 +10297,12 @@
         </p:nvSpPr>
         <p:spPr>
           <a:xfrm>
-            <a:off x="2813304" y="2109216"/>
-            <a:ext cx="1267968" cy="1267968"/>
+            <a:off x="2942082" y="2057400"/>
+            <a:ext cx="1371600" cy="1371600"/>
           </a:xfrm>
           <a:prstGeom prst="roundRect">
             <a:avLst>
-              <a:gd name="adj" fmla="val 10096"/>
+              <a:gd name="adj" fmla="val 9333"/>
             </a:avLst>
           </a:prstGeom>
           <a:solidFill>
@@ -10322,7 +10322,7 @@
               <a:buNone/>
             </a:pPr>
             <a:r>
-              <a:rPr lang="ko-KR" altLang="en-US" sz="5500" b="1" dirty="0">
+              <a:rPr lang="ko-KR" altLang="en-US" sz="5900" b="1" dirty="0">
                 <a:solidFill>
                   <a:srgbClr val="1F2937"/>
                 </a:solidFill>
@@ -10332,7 +10332,7 @@
               </a:rPr>
               <a:t>ㄴ</a:t>
             </a:r>
-            <a:endParaRPr lang="ko-KR" sz="5500" dirty="0"/>
+            <a:endParaRPr lang="ko-KR" sz="5900" dirty="0"/>
           </a:p>
         </p:txBody>
       </p:sp>
@@ -10344,12 +10344,12 @@
         </p:nvSpPr>
         <p:spPr>
           <a:xfrm>
-            <a:off x="4282440" y="2109216"/>
-            <a:ext cx="1267968" cy="1267968"/>
+            <a:off x="4514850" y="2057400"/>
+            <a:ext cx="1371600" cy="1371600"/>
           </a:xfrm>
           <a:prstGeom prst="roundRect">
             <a:avLst>
-              <a:gd name="adj" fmla="val 10096"/>
+              <a:gd name="adj" fmla="val 9333"/>
             </a:avLst>
           </a:prstGeom>
           <a:solidFill>
@@ -10369,7 +10369,7 @@
               <a:buNone/>
             </a:pPr>
             <a:r>
-              <a:rPr lang="ko-KR" altLang="en-US" sz="5500" b="1" dirty="0">
+              <a:rPr lang="ko-KR" altLang="en-US" sz="5900" b="1" dirty="0">
                 <a:solidFill>
                   <a:srgbClr val="1F2937"/>
                 </a:solidFill>
@@ -10379,7 +10379,7 @@
               </a:rPr>
               <a:t>ㅁ</a:t>
             </a:r>
-            <a:endParaRPr lang="ko-KR" sz="5500" dirty="0"/>
+            <a:endParaRPr lang="ko-KR" sz="5900" dirty="0"/>
           </a:p>
         </p:txBody>
       </p:sp>
@@ -10438,12 +10438,12 @@
         </p:nvSpPr>
         <p:spPr>
           <a:xfrm>
-            <a:off x="7072884" y="2109216"/>
-            <a:ext cx="1267968" cy="1267968"/>
+            <a:off x="7098030" y="2057400"/>
+            <a:ext cx="1371600" cy="1371600"/>
           </a:xfrm>
           <a:prstGeom prst="roundRect">
             <a:avLst>
-              <a:gd name="adj" fmla="val 10096"/>
+              <a:gd name="adj" fmla="val 9333"/>
             </a:avLst>
           </a:prstGeom>
           <a:solidFill>
@@ -10463,7 +10463,7 @@
               <a:buNone/>
             </a:pPr>
             <a:r>
-              <a:rPr lang="ko-KR" altLang="en-US" sz="5500" b="1" dirty="0">
+              <a:rPr lang="ko-KR" altLang="en-US" sz="5900" b="1" dirty="0">
                 <a:solidFill>
                   <a:srgbClr val="1F2937"/>
                 </a:solidFill>
@@ -10473,7 +10473,7 @@
               </a:rPr>
               <a:t>ㅂ</a:t>
             </a:r>
-            <a:endParaRPr lang="ko-KR" sz="5500" dirty="0"/>
+            <a:endParaRPr lang="ko-KR" sz="5900" dirty="0"/>
           </a:p>
         </p:txBody>
       </p:sp>
@@ -10485,12 +10485,12 @@
         </p:nvSpPr>
         <p:spPr>
           <a:xfrm>
-            <a:off x="8542020" y="2109216"/>
-            <a:ext cx="1267968" cy="1267968"/>
+            <a:off x="8670798" y="2057400"/>
+            <a:ext cx="1371600" cy="1371600"/>
           </a:xfrm>
           <a:prstGeom prst="roundRect">
             <a:avLst>
-              <a:gd name="adj" fmla="val 10096"/>
+              <a:gd name="adj" fmla="val 9333"/>
             </a:avLst>
           </a:prstGeom>
           <a:solidFill>
@@ -10510,7 +10510,7 @@
               <a:buNone/>
             </a:pPr>
             <a:r>
-              <a:rPr lang="ko-KR" altLang="en-US" sz="5500" b="1" dirty="0">
+              <a:rPr lang="ko-KR" altLang="en-US" sz="5900" b="1" dirty="0">
                 <a:solidFill>
                   <a:srgbClr val="1F2937"/>
                 </a:solidFill>
@@ -10520,7 +10520,7 @@
               </a:rPr>
               <a:t>ㅅ</a:t>
             </a:r>
-            <a:endParaRPr lang="ko-KR" sz="5500" dirty="0"/>
+            <a:endParaRPr lang="ko-KR" sz="5900" dirty="0"/>
           </a:p>
         </p:txBody>
       </p:sp>
@@ -10532,12 +10532,12 @@
         </p:nvSpPr>
         <p:spPr>
           <a:xfrm>
-            <a:off x="10011156" y="2109216"/>
-            <a:ext cx="1267968" cy="1267968"/>
+            <a:off x="10243566" y="2057400"/>
+            <a:ext cx="1371600" cy="1371600"/>
           </a:xfrm>
           <a:prstGeom prst="roundRect">
             <a:avLst>
-              <a:gd name="adj" fmla="val 10096"/>
+              <a:gd name="adj" fmla="val 9333"/>
             </a:avLst>
           </a:prstGeom>
           <a:solidFill>
@@ -10557,7 +10557,7 @@
               <a:buNone/>
             </a:pPr>
             <a:r>
-              <a:rPr lang="ko-KR" altLang="en-US" sz="5500" b="1" dirty="0">
+              <a:rPr lang="ko-KR" altLang="en-US" sz="5900" b="1" dirty="0">
                 <a:solidFill>
                   <a:srgbClr val="1F2937"/>
                 </a:solidFill>
@@ -10567,7 +10567,7 @@
               </a:rPr>
               <a:t>ㅈ</a:t>
             </a:r>
-            <a:endParaRPr lang="ko-KR" sz="5500" dirty="0"/>
+            <a:endParaRPr lang="ko-KR" sz="5900" dirty="0"/>
           </a:p>
         </p:txBody>
       </p:sp>
@@ -10626,12 +10626,12 @@
         </p:nvSpPr>
         <p:spPr>
           <a:xfrm>
-            <a:off x="1344168" y="3755136"/>
-            <a:ext cx="1267968" cy="1267968"/>
+            <a:off x="1369314" y="3703320"/>
+            <a:ext cx="1371600" cy="1371600"/>
           </a:xfrm>
           <a:prstGeom prst="roundRect">
             <a:avLst>
-              <a:gd name="adj" fmla="val 10096"/>
+              <a:gd name="adj" fmla="val 9333"/>
             </a:avLst>
           </a:prstGeom>
           <a:solidFill>
@@ -10651,7 +10651,7 @@
               <a:buNone/>
             </a:pPr>
             <a:r>
-              <a:rPr lang="ko-KR" altLang="en-US" sz="5500" b="1" dirty="0">
+              <a:rPr lang="ko-KR" altLang="en-US" sz="5900" b="1" dirty="0">
                 <a:solidFill>
                   <a:srgbClr val="1F2937"/>
                 </a:solidFill>
@@ -10661,7 +10661,7 @@
               </a:rPr>
               <a:t>ㄷ</a:t>
             </a:r>
-            <a:endParaRPr lang="ko-KR" sz="5500" dirty="0"/>
+            <a:endParaRPr lang="ko-KR" sz="5900" dirty="0"/>
           </a:p>
         </p:txBody>
       </p:sp>
@@ -10673,12 +10673,12 @@
         </p:nvSpPr>
         <p:spPr>
           <a:xfrm>
-            <a:off x="2813304" y="3755136"/>
-            <a:ext cx="1267968" cy="1267968"/>
+            <a:off x="2942082" y="3703320"/>
+            <a:ext cx="1371600" cy="1371600"/>
           </a:xfrm>
           <a:prstGeom prst="roundRect">
             <a:avLst>
-              <a:gd name="adj" fmla="val 10096"/>
+              <a:gd name="adj" fmla="val 9333"/>
             </a:avLst>
           </a:prstGeom>
           <a:solidFill>
@@ -10698,7 +10698,7 @@
               <a:buNone/>
             </a:pPr>
             <a:r>
-              <a:rPr lang="ko-KR" altLang="en-US" sz="5500" b="1" dirty="0">
+              <a:rPr lang="ko-KR" altLang="en-US" sz="5900" b="1" dirty="0">
                 <a:solidFill>
                   <a:srgbClr val="1F2937"/>
                 </a:solidFill>
@@ -10708,7 +10708,7 @@
               </a:rPr>
               <a:t>ㅌ</a:t>
             </a:r>
-            <a:endParaRPr lang="ko-KR" sz="5500" dirty="0"/>
+            <a:endParaRPr lang="ko-KR" sz="5900" dirty="0"/>
           </a:p>
         </p:txBody>
       </p:sp>
@@ -10720,12 +10720,12 @@
         </p:nvSpPr>
         <p:spPr>
           <a:xfrm>
-            <a:off x="4282440" y="3755136"/>
-            <a:ext cx="1267968" cy="1267968"/>
+            <a:off x="4514850" y="3703320"/>
+            <a:ext cx="1371600" cy="1371600"/>
           </a:xfrm>
           <a:prstGeom prst="roundRect">
             <a:avLst>
-              <a:gd name="adj" fmla="val 10096"/>
+              <a:gd name="adj" fmla="val 9333"/>
             </a:avLst>
           </a:prstGeom>
           <a:solidFill>
@@ -10745,7 +10745,7 @@
               <a:buNone/>
             </a:pPr>
             <a:r>
-              <a:rPr lang="ko-KR" altLang="en-US" sz="5500" b="1" dirty="0">
+              <a:rPr lang="ko-KR" altLang="en-US" sz="5900" b="1" dirty="0">
                 <a:solidFill>
                   <a:srgbClr val="1F2937"/>
                 </a:solidFill>
@@ -10755,7 +10755,7 @@
               </a:rPr>
               <a:t>ㄹ</a:t>
             </a:r>
-            <a:endParaRPr lang="ko-KR" sz="5500" dirty="0"/>
+            <a:endParaRPr lang="ko-KR" sz="5900" dirty="0"/>
           </a:p>
         </p:txBody>
       </p:sp>
@@ -10814,12 +10814,12 @@
         </p:nvSpPr>
         <p:spPr>
           <a:xfrm>
-            <a:off x="7072884" y="3755136"/>
-            <a:ext cx="1267968" cy="1267968"/>
+            <a:off x="7098030" y="3703320"/>
+            <a:ext cx="1371600" cy="1371600"/>
           </a:xfrm>
           <a:prstGeom prst="roundRect">
             <a:avLst>
-              <a:gd name="adj" fmla="val 10096"/>
+              <a:gd name="adj" fmla="val 9333"/>
             </a:avLst>
           </a:prstGeom>
           <a:solidFill>
@@ -10839,7 +10839,7 @@
               <a:buNone/>
             </a:pPr>
             <a:r>
-              <a:rPr lang="ko-KR" altLang="en-US" sz="5500" b="1" dirty="0">
+              <a:rPr lang="ko-KR" altLang="en-US" sz="5900" b="1" dirty="0">
                 <a:solidFill>
                   <a:srgbClr val="1F2937"/>
                 </a:solidFill>
@@ -10849,7 +10849,7 @@
               </a:rPr>
               <a:t>ㅎ</a:t>
             </a:r>
-            <a:endParaRPr lang="ko-KR" sz="5500" dirty="0"/>
+            <a:endParaRPr lang="ko-KR" sz="5900" dirty="0"/>
           </a:p>
         </p:txBody>
       </p:sp>
@@ -10861,12 +10861,12 @@
         </p:nvSpPr>
         <p:spPr>
           <a:xfrm>
-            <a:off x="8542020" y="3755136"/>
-            <a:ext cx="1267968" cy="1267968"/>
+            <a:off x="8670798" y="3703320"/>
+            <a:ext cx="1371600" cy="1371600"/>
           </a:xfrm>
           <a:prstGeom prst="roundRect">
             <a:avLst>
-              <a:gd name="adj" fmla="val 10096"/>
+              <a:gd name="adj" fmla="val 9333"/>
             </a:avLst>
           </a:prstGeom>
           <a:solidFill>
@@ -10886,7 +10886,7 @@
               <a:buNone/>
             </a:pPr>
             <a:r>
-              <a:rPr lang="ko-KR" altLang="en-US" sz="5500" b="1" dirty="0">
+              <a:rPr lang="ko-KR" altLang="en-US" sz="5900" b="1" dirty="0">
                 <a:solidFill>
                   <a:srgbClr val="1F2937"/>
                 </a:solidFill>
@@ -10896,7 +10896,7 @@
               </a:rPr>
               <a:t>ㅇ</a:t>
             </a:r>
-            <a:endParaRPr lang="ko-KR" sz="5500" dirty="0"/>
+            <a:endParaRPr lang="ko-KR" sz="5900" dirty="0"/>
           </a:p>
         </p:txBody>
       </p:sp>
@@ -10908,12 +10908,12 @@
         </p:nvSpPr>
         <p:spPr>
           <a:xfrm>
-            <a:off x="10011156" y="3755136"/>
-            <a:ext cx="1267968" cy="1267968"/>
+            <a:off x="10243566" y="3703320"/>
+            <a:ext cx="1371600" cy="1371600"/>
           </a:xfrm>
           <a:prstGeom prst="roundRect">
             <a:avLst>
-              <a:gd name="adj" fmla="val 10096"/>
+              <a:gd name="adj" fmla="val 9333"/>
             </a:avLst>
           </a:prstGeom>
           <a:solidFill>
@@ -10933,7 +10933,7 @@
               <a:buNone/>
             </a:pPr>
             <a:r>
-              <a:rPr lang="ko-KR" altLang="en-US" sz="5500" b="1" dirty="0">
+              <a:rPr lang="ko-KR" altLang="en-US" sz="5900" b="1" dirty="0">
                 <a:solidFill>
                   <a:srgbClr val="1F2937"/>
                 </a:solidFill>
@@ -10943,7 +10943,7 @@
               </a:rPr>
               <a:t>ㅍ</a:t>
             </a:r>
-            <a:endParaRPr lang="ko-KR" sz="5500" dirty="0"/>
+            <a:endParaRPr lang="ko-KR" sz="5900" dirty="0"/>
           </a:p>
         </p:txBody>
       </p:sp>

--- a/dist/초1/국어/한글/초1_국어_한글_02_기본자음.pptx
+++ b/dist/초1/국어/한글/초1_국어_한글_02_기본자음.pptx
@@ -120,13 +120,13 @@
   <p:extLst>
     <p:ext uri="{521415D9-36F7-43E2-AB2F-B90AF26B5E84}">
       <p14:sectionLst xmlns:p14="http://schemas.microsoft.com/office/powerpoint/2010/main">
-        <p14:section name="도입" id="{7a361494-8ca4-f420-750a-39bc36eb996e}">
+        <p14:section name="도입" id="{8be455bf-8116-f385-023f-fc957d490623}">
           <p14:sldIdLst>
             <p14:sldId id="256"/>
             <p14:sldId id="257"/>
           </p14:sldIdLst>
         </p14:section>
-        <p14:section name="개념" id="{2faba034-8c9e-942d-10c0-c64c5da061d7}">
+        <p14:section name="개념" id="{fa5b63ca-8ec6-12b1-3c17-5b63e1fab4fa}">
           <p14:sldIdLst>
             <p14:sldId id="258"/>
             <p14:sldId id="259"/>
@@ -134,26 +134,26 @@
             <p14:sldId id="261"/>
           </p14:sldIdLst>
         </p14:section>
-        <p14:section name="연습" id="{af8d108e-857d-7a9f-2abe-ef33da81ab20}">
+        <p14:section name="연습" id="{17a6b39e-412a-50f9-8798-4dc79129c3bd}">
           <p14:sldIdLst>
             <p14:sldId id="262"/>
             <p14:sldId id="263"/>
             <p14:sldId id="264"/>
           </p14:sldIdLst>
         </p14:section>
-        <p14:section name="확인" id="{1ff69645-043d-f23f-650d-fd6135ff6599}">
+        <p14:section name="확인" id="{5c40d65b-6ac9-ed2a-593b-4ca38ae8200d}">
           <p14:sldIdLst>
             <p14:sldId id="265"/>
             <p14:sldId id="266"/>
             <p14:sldId id="267"/>
           </p14:sldIdLst>
         </p14:section>
-        <p14:section name="정리" id="{2468a9e3-91b7-f20d-6c25-2b4844fd5832}">
+        <p14:section name="정리" id="{2d7dc9be-af8c-05f5-eaa1-32327e7ba8ce}">
           <p14:sldIdLst>
             <p14:sldId id="268"/>
           </p14:sldIdLst>
         </p14:section>
-        <p14:section name="보충" id="{d1e3630a-57ca-e69c-4d41-844508012d39}">
+        <p14:section name="보충" id="{1e20ec07-1566-1fa4-2198-5431a3d85f4f}">
           <p14:sldIdLst>
             <p14:sldId id="269"/>
           </p14:sldIdLst>
